--- a/Suresh Narra.pptx
+++ b/Suresh Narra.pptx
@@ -346,7 +346,7 @@
           <a:p>
             <a:fld id="{E9C89D63-B5F4-41D9-BF36-D8AA50F08B6E}" type="datetimeFigureOut">
               <a:rPr lang="en-GB" smtClean="0"/>
-              <a:t>12/05/2023</a:t>
+              <a:t>22/01/2025</a:t>
             </a:fld>
             <a:endParaRPr lang="en-GB"/>
           </a:p>
@@ -546,7 +546,7 @@
           <a:p>
             <a:fld id="{E9C89D63-B5F4-41D9-BF36-D8AA50F08B6E}" type="datetimeFigureOut">
               <a:rPr lang="en-GB" smtClean="0"/>
-              <a:t>12/05/2023</a:t>
+              <a:t>22/01/2025</a:t>
             </a:fld>
             <a:endParaRPr lang="en-GB"/>
           </a:p>
@@ -756,7 +756,7 @@
           <a:p>
             <a:fld id="{E9C89D63-B5F4-41D9-BF36-D8AA50F08B6E}" type="datetimeFigureOut">
               <a:rPr lang="en-GB" smtClean="0"/>
-              <a:t>12/05/2023</a:t>
+              <a:t>22/01/2025</a:t>
             </a:fld>
             <a:endParaRPr lang="en-GB"/>
           </a:p>
@@ -956,7 +956,7 @@
           <a:p>
             <a:fld id="{E9C89D63-B5F4-41D9-BF36-D8AA50F08B6E}" type="datetimeFigureOut">
               <a:rPr lang="en-GB" smtClean="0"/>
-              <a:t>12/05/2023</a:t>
+              <a:t>22/01/2025</a:t>
             </a:fld>
             <a:endParaRPr lang="en-GB"/>
           </a:p>
@@ -1232,7 +1232,7 @@
           <a:p>
             <a:fld id="{E9C89D63-B5F4-41D9-BF36-D8AA50F08B6E}" type="datetimeFigureOut">
               <a:rPr lang="en-GB" smtClean="0"/>
-              <a:t>12/05/2023</a:t>
+              <a:t>22/01/2025</a:t>
             </a:fld>
             <a:endParaRPr lang="en-GB"/>
           </a:p>
@@ -1500,7 +1500,7 @@
           <a:p>
             <a:fld id="{E9C89D63-B5F4-41D9-BF36-D8AA50F08B6E}" type="datetimeFigureOut">
               <a:rPr lang="en-GB" smtClean="0"/>
-              <a:t>12/05/2023</a:t>
+              <a:t>22/01/2025</a:t>
             </a:fld>
             <a:endParaRPr lang="en-GB"/>
           </a:p>
@@ -1915,7 +1915,7 @@
           <a:p>
             <a:fld id="{E9C89D63-B5F4-41D9-BF36-D8AA50F08B6E}" type="datetimeFigureOut">
               <a:rPr lang="en-GB" smtClean="0"/>
-              <a:t>12/05/2023</a:t>
+              <a:t>22/01/2025</a:t>
             </a:fld>
             <a:endParaRPr lang="en-GB"/>
           </a:p>
@@ -2057,7 +2057,7 @@
           <a:p>
             <a:fld id="{E9C89D63-B5F4-41D9-BF36-D8AA50F08B6E}" type="datetimeFigureOut">
               <a:rPr lang="en-GB" smtClean="0"/>
-              <a:t>12/05/2023</a:t>
+              <a:t>22/01/2025</a:t>
             </a:fld>
             <a:endParaRPr lang="en-GB"/>
           </a:p>
@@ -2170,7 +2170,7 @@
           <a:p>
             <a:fld id="{E9C89D63-B5F4-41D9-BF36-D8AA50F08B6E}" type="datetimeFigureOut">
               <a:rPr lang="en-GB" smtClean="0"/>
-              <a:t>12/05/2023</a:t>
+              <a:t>22/01/2025</a:t>
             </a:fld>
             <a:endParaRPr lang="en-GB"/>
           </a:p>
@@ -2483,7 +2483,7 @@
           <a:p>
             <a:fld id="{E9C89D63-B5F4-41D9-BF36-D8AA50F08B6E}" type="datetimeFigureOut">
               <a:rPr lang="en-GB" smtClean="0"/>
-              <a:t>12/05/2023</a:t>
+              <a:t>22/01/2025</a:t>
             </a:fld>
             <a:endParaRPr lang="en-GB"/>
           </a:p>
@@ -2772,7 +2772,7 @@
           <a:p>
             <a:fld id="{E9C89D63-B5F4-41D9-BF36-D8AA50F08B6E}" type="datetimeFigureOut">
               <a:rPr lang="en-GB" smtClean="0"/>
-              <a:t>12/05/2023</a:t>
+              <a:t>22/01/2025</a:t>
             </a:fld>
             <a:endParaRPr lang="en-GB"/>
           </a:p>
@@ -3015,7 +3015,7 @@
           <a:p>
             <a:fld id="{E9C89D63-B5F4-41D9-BF36-D8AA50F08B6E}" type="datetimeFigureOut">
               <a:rPr lang="en-GB" smtClean="0"/>
-              <a:t>12/05/2023</a:t>
+              <a:t>22/01/2025</a:t>
             </a:fld>
             <a:endParaRPr lang="en-GB"/>
           </a:p>
@@ -3108,6 +3108,54 @@
               <a:t>‹#›</a:t>
             </a:fld>
             <a:endParaRPr lang="en-GB"/>
+          </a:p>
+        </p:txBody>
+      </p:sp>
+      <p:sp>
+        <p:nvSpPr>
+          <p:cNvPr id="7" name="MSIPCMContentMarking" descr="{&quot;HashCode&quot;:1227105120,&quot;Placement&quot;:&quot;Header&quot;,&quot;Top&quot;:0.0,&quot;Left&quot;:887.8163,&quot;SlideWidth&quot;:960,&quot;SlideHeight&quot;:540}">
+            <a:extLst>
+              <a:ext uri="{FF2B5EF4-FFF2-40B4-BE49-F238E27FC236}">
+                <a16:creationId xmlns:a16="http://schemas.microsoft.com/office/drawing/2014/main" id="{61D74EEC-C58B-24CB-8F6D-03D89BF2C673}"/>
+              </a:ext>
+            </a:extLst>
+          </p:cNvPr>
+          <p:cNvSpPr txBox="1"/>
+          <p:nvPr userDrawn="1"/>
+        </p:nvSpPr>
+        <p:spPr>
+          <a:xfrm>
+            <a:off x="11275267" y="0"/>
+            <a:ext cx="916733" cy="262344"/>
+          </a:xfrm>
+          <a:prstGeom prst="rect">
+            <a:avLst/>
+          </a:prstGeom>
+          <a:noFill/>
+        </p:spPr>
+        <p:txBody>
+          <a:bodyPr vert="horz" wrap="square" lIns="0" tIns="0" rIns="0" bIns="0" rtlCol="0" anchor="ctr" anchorCtr="1">
+            <a:spAutoFit/>
+          </a:bodyPr>
+          <a:lstStyle/>
+          <a:p>
+            <a:pPr algn="r">
+              <a:spcBef>
+                <a:spcPts val="0"/>
+              </a:spcBef>
+              <a:spcAft>
+                <a:spcPts val="0"/>
+              </a:spcAft>
+            </a:pPr>
+            <a:r>
+              <a:rPr lang="en-GB" sz="1000">
+                <a:solidFill>
+                  <a:srgbClr val="000000"/>
+                </a:solidFill>
+                <a:latin typeface="Calibri" panose="020F0502020204030204" pitchFamily="34" charset="0"/>
+              </a:rPr>
+              <a:t>CORPORATE</a:t>
+            </a:r>
           </a:p>
         </p:txBody>
       </p:sp>
@@ -3446,7 +3494,7 @@
         </p:nvSpPr>
         <p:spPr>
           <a:xfrm>
-            <a:off x="0" y="0"/>
+            <a:off x="0" y="-14725"/>
             <a:ext cx="12192000" cy="1152525"/>
           </a:xfrm>
           <a:prstGeom prst="rect">
@@ -3981,18 +4029,6 @@
             </a:r>
           </a:p>
           <a:p>
-            <a:pPr algn="just" eaLnBrk="1" hangingPunct="1">
-              <a:buSzPct val="100000"/>
-              <a:defRPr/>
-            </a:pPr>
-            <a:endParaRPr lang="en-US" altLang="en-US" sz="1400" b="1" dirty="0">
-              <a:solidFill>
-                <a:schemeClr val="tx1"/>
-              </a:solidFill>
-              <a:latin typeface="Calibri" panose="020F0502020204030204" pitchFamily="34" charset="0"/>
-            </a:endParaRPr>
-          </a:p>
-          <a:p>
             <a:pPr marL="168275">
               <a:lnSpc>
                 <a:spcPct val="93000"/>
@@ -4303,6 +4339,71 @@
               </a:rPr>
               <a:t>Apttus CLM Trained.</a:t>
             </a:r>
+          </a:p>
+          <a:p>
+            <a:pPr marL="168275">
+              <a:lnSpc>
+                <a:spcPct val="93000"/>
+              </a:lnSpc>
+              <a:buClr>
+                <a:srgbClr val="000000"/>
+              </a:buClr>
+              <a:buSzPct val="100000"/>
+              <a:buFont typeface="Arial" panose="020B0604020202020204" pitchFamily="34" charset="0"/>
+              <a:buChar char="•"/>
+              <a:defRPr/>
+            </a:pPr>
+            <a:r>
+              <a:rPr lang="en-GB" sz="1100" dirty="0">
+                <a:solidFill>
+                  <a:schemeClr val="tx1"/>
+                </a:solidFill>
+                <a:latin typeface="Calibri" panose="020F0502020204030204" pitchFamily="34" charset="0"/>
+              </a:rPr>
+              <a:t>MuleSoft, </a:t>
+            </a:r>
+            <a:r>
+              <a:rPr lang="en-GB" sz="1100" dirty="0" err="1">
+                <a:solidFill>
+                  <a:schemeClr val="tx1"/>
+                </a:solidFill>
+                <a:latin typeface="Calibri" panose="020F0502020204030204" pitchFamily="34" charset="0"/>
+              </a:rPr>
+              <a:t>SnapLogic</a:t>
+            </a:r>
+            <a:r>
+              <a:rPr lang="en-GB" sz="1100" dirty="0">
+                <a:solidFill>
+                  <a:schemeClr val="tx1"/>
+                </a:solidFill>
+                <a:latin typeface="Calibri" panose="020F0502020204030204" pitchFamily="34" charset="0"/>
+              </a:rPr>
+              <a:t>, Boomi, Informatica: API design, </a:t>
+            </a:r>
+            <a:r>
+              <a:rPr lang="en-GB" sz="1100" dirty="0" err="1">
+                <a:solidFill>
+                  <a:schemeClr val="tx1"/>
+                </a:solidFill>
+                <a:latin typeface="Calibri" panose="020F0502020204030204" pitchFamily="34" charset="0"/>
+              </a:rPr>
+              <a:t>Anypoint</a:t>
+            </a:r>
+            <a:r>
+              <a:rPr lang="en-GB" sz="1100" dirty="0">
+                <a:solidFill>
+                  <a:schemeClr val="tx1"/>
+                </a:solidFill>
+                <a:latin typeface="Calibri" panose="020F0502020204030204" pitchFamily="34" charset="0"/>
+              </a:rPr>
+              <a:t> Platform, connectors (HTTP, Salesforce, Database, etc.).</a:t>
+            </a:r>
+            <a:endParaRPr lang="en-US" altLang="en-US" sz="1100" dirty="0">
+              <a:solidFill>
+                <a:schemeClr val="tx1"/>
+              </a:solidFill>
+              <a:latin typeface="Calibri" panose="020F0502020204030204" pitchFamily="34" charset="0"/>
+            </a:endParaRPr>
           </a:p>
           <a:p>
             <a:pPr marL="168275">
@@ -4401,131 +4502,7 @@
               <a:buSzPct val="100000"/>
               <a:defRPr/>
             </a:pPr>
-            <a:r>
-              <a:rPr lang="en-US" altLang="en-US" sz="1200" b="1" dirty="0">
-                <a:solidFill>
-                  <a:schemeClr val="tx1"/>
-                </a:solidFill>
-                <a:latin typeface="Calibri" panose="020F0502020204030204" pitchFamily="34" charset="0"/>
-              </a:rPr>
-              <a:t>Professional Experience</a:t>
-            </a:r>
-          </a:p>
-          <a:p>
-            <a:pPr marL="168275">
-              <a:lnSpc>
-                <a:spcPct val="93000"/>
-              </a:lnSpc>
-              <a:buClr>
-                <a:srgbClr val="000000"/>
-              </a:buClr>
-              <a:buSzPct val="100000"/>
-              <a:buFont typeface="Arial" panose="020B0604020202020204" pitchFamily="34" charset="0"/>
-              <a:buChar char="•"/>
-              <a:defRPr/>
-            </a:pPr>
-            <a:r>
-              <a:rPr lang="en-US" altLang="en-US" sz="1100" dirty="0">
-                <a:solidFill>
-                  <a:schemeClr val="tx1"/>
-                </a:solidFill>
-                <a:latin typeface="Calibri" panose="020F0502020204030204" pitchFamily="34" charset="0"/>
-              </a:rPr>
-              <a:t>Overall, 18 years of experience with experience in delivering multiple end to end Salesforce, Apttus CPQ, SAP ECC, CRM, Vistex, License Management projects</a:t>
-            </a:r>
-          </a:p>
-          <a:p>
-            <a:pPr marL="538605" lvl="1">
-              <a:lnSpc>
-                <a:spcPct val="93000"/>
-              </a:lnSpc>
-              <a:buClr>
-                <a:srgbClr val="000000"/>
-              </a:buClr>
-              <a:buSzPct val="100000"/>
-              <a:buFont typeface="Arial" panose="020B0604020202020204" pitchFamily="34" charset="0"/>
-              <a:buChar char="•"/>
-              <a:defRPr/>
-            </a:pPr>
-            <a:r>
-              <a:rPr lang="en-US" altLang="en-US" sz="1100" dirty="0">
-                <a:solidFill>
-                  <a:schemeClr val="tx1"/>
-                </a:solidFill>
-                <a:latin typeface="Calibri" panose="020F0502020204030204" pitchFamily="34" charset="0"/>
-              </a:rPr>
-              <a:t> SAP – 6 Years</a:t>
-            </a:r>
-          </a:p>
-          <a:p>
-            <a:pPr marL="538605" lvl="1">
-              <a:lnSpc>
-                <a:spcPct val="93000"/>
-              </a:lnSpc>
-              <a:buClr>
-                <a:srgbClr val="000000"/>
-              </a:buClr>
-              <a:buSzPct val="100000"/>
-              <a:buFont typeface="Arial" panose="020B0604020202020204" pitchFamily="34" charset="0"/>
-              <a:buChar char="•"/>
-              <a:defRPr/>
-            </a:pPr>
-            <a:r>
-              <a:rPr lang="en-US" altLang="en-US" sz="1100" dirty="0">
-                <a:solidFill>
-                  <a:schemeClr val="tx1"/>
-                </a:solidFill>
-                <a:latin typeface="Calibri" panose="020F0502020204030204" pitchFamily="34" charset="0"/>
-              </a:rPr>
-              <a:t> Salesforce – 12 Years  </a:t>
-            </a:r>
-          </a:p>
-          <a:p>
-            <a:pPr marL="168275">
-              <a:lnSpc>
-                <a:spcPct val="93000"/>
-              </a:lnSpc>
-              <a:buClr>
-                <a:srgbClr val="000000"/>
-              </a:buClr>
-              <a:buSzPct val="100000"/>
-              <a:buFont typeface="Arial" panose="020B0604020202020204" pitchFamily="34" charset="0"/>
-              <a:buChar char="•"/>
-              <a:defRPr/>
-            </a:pPr>
-            <a:r>
-              <a:rPr lang="en-US" altLang="en-US" sz="1100" dirty="0">
-                <a:solidFill>
-                  <a:schemeClr val="tx1"/>
-                </a:solidFill>
-                <a:latin typeface="Calibri" panose="020F0502020204030204" pitchFamily="34" charset="0"/>
-              </a:rPr>
-              <a:t>Leading clients  to  achieve  optimized  solutions while analyzing  their business  requirements  and  processes  to  match them with  CPQ  and  Salesforce, SAP, License Management features  and  functionality of  the  Force.com platform  to  improve business operations,  user  adaptation  and  the  customer  experience.</a:t>
-            </a:r>
-          </a:p>
-          <a:p>
-            <a:pPr marL="168275">
-              <a:lnSpc>
-                <a:spcPct val="93000"/>
-              </a:lnSpc>
-              <a:buClr>
-                <a:srgbClr val="000000"/>
-              </a:buClr>
-              <a:buSzPct val="100000"/>
-              <a:buFont typeface="Arial" panose="020B0604020202020204" pitchFamily="34" charset="0"/>
-              <a:buChar char="•"/>
-              <a:defRPr/>
-            </a:pPr>
-            <a:r>
-              <a:rPr lang="en-GB" altLang="en-US" sz="1100" dirty="0">
-                <a:solidFill>
-                  <a:schemeClr val="tx1"/>
-                </a:solidFill>
-                <a:latin typeface="Calibri" panose="020F0502020204030204" pitchFamily="34" charset="0"/>
-              </a:rPr>
-              <a:t>Understand business requirements and be able to map them to solution and architecture design accordingly.</a:t>
-            </a:r>
-            <a:endParaRPr lang="en-US" altLang="en-US" sz="1100" dirty="0">
+            <a:endParaRPr lang="en-US" altLang="en-US" sz="1200" b="1" dirty="0">
               <a:solidFill>
                 <a:schemeClr val="tx1"/>
               </a:solidFill>
@@ -4533,110 +4510,22 @@
             </a:endParaRPr>
           </a:p>
           <a:p>
-            <a:pPr marL="168275">
+            <a:pPr algn="just" eaLnBrk="1" hangingPunct="1">
               <a:lnSpc>
-                <a:spcPct val="93000"/>
+                <a:spcPct val="90000"/>
               </a:lnSpc>
-              <a:buClr>
-                <a:srgbClr val="000000"/>
-              </a:buClr>
               <a:buSzPct val="100000"/>
-              <a:buFont typeface="Arial" panose="020B0604020202020204" pitchFamily="34" charset="0"/>
-              <a:buChar char="•"/>
               <a:defRPr/>
             </a:pPr>
             <a:r>
-              <a:rPr lang="en-US" altLang="en-US" sz="1100" dirty="0">
+              <a:rPr lang="en-US" altLang="en-US" sz="1200" b="1" dirty="0">
                 <a:solidFill>
                   <a:schemeClr val="tx1"/>
                 </a:solidFill>
                 <a:latin typeface="Calibri" panose="020F0502020204030204" pitchFamily="34" charset="0"/>
               </a:rPr>
-              <a:t>Delivered multiple projects on Salesforce, SAP for clients- Adobe, Thomson Reuters, Aptech, Refinitiv, LSEG.</a:t>
-            </a:r>
-          </a:p>
-          <a:p>
-            <a:pPr marL="168275">
-              <a:lnSpc>
-                <a:spcPct val="93000"/>
-              </a:lnSpc>
-              <a:buClr>
-                <a:srgbClr val="000000"/>
-              </a:buClr>
-              <a:buSzPct val="100000"/>
-              <a:buFont typeface="Arial" panose="020B0604020202020204" pitchFamily="34" charset="0"/>
-              <a:buChar char="•"/>
-              <a:defRPr/>
-            </a:pPr>
-            <a:r>
-              <a:rPr lang="en-US" altLang="en-US" sz="1100" dirty="0">
-                <a:solidFill>
-                  <a:schemeClr val="tx1"/>
-                </a:solidFill>
-                <a:latin typeface="Calibri" panose="020F0502020204030204" pitchFamily="34" charset="0"/>
-              </a:rPr>
-              <a:t>Part of the projects where both Agile and Waterfall methodologies were used</a:t>
-            </a:r>
-          </a:p>
-          <a:p>
-            <a:pPr marL="168275">
-              <a:lnSpc>
-                <a:spcPct val="93000"/>
-              </a:lnSpc>
-              <a:buClr>
-                <a:srgbClr val="000000"/>
-              </a:buClr>
-              <a:buSzPct val="100000"/>
-              <a:buFont typeface="Arial" panose="020B0604020202020204" pitchFamily="34" charset="0"/>
-              <a:buChar char="•"/>
-              <a:defRPr/>
-            </a:pPr>
-            <a:endParaRPr lang="en-US" altLang="en-US" sz="1100" dirty="0">
-              <a:solidFill>
-                <a:schemeClr val="tx1"/>
-              </a:solidFill>
-              <a:latin typeface="Calibri" panose="020F0502020204030204" pitchFamily="34" charset="0"/>
-            </a:endParaRPr>
-          </a:p>
-          <a:p>
-            <a:pPr marL="168275" eaLnBrk="1" hangingPunct="1">
-              <a:lnSpc>
-                <a:spcPct val="93000"/>
-              </a:lnSpc>
-              <a:buClr>
-                <a:srgbClr val="000000"/>
-              </a:buClr>
-              <a:buSzPct val="100000"/>
-              <a:buFont typeface="Arial" panose="020B0604020202020204" pitchFamily="34" charset="0"/>
-              <a:buChar char="•"/>
-              <a:defRPr/>
-            </a:pPr>
-            <a:endParaRPr lang="en-US" altLang="en-US" sz="1100" dirty="0">
-              <a:solidFill>
-                <a:schemeClr val="tx1"/>
-              </a:solidFill>
-              <a:latin typeface="Calibri" panose="020F0502020204030204" pitchFamily="34" charset="0"/>
-            </a:endParaRPr>
-          </a:p>
-          <a:p>
-            <a:pPr marL="168275" eaLnBrk="1" hangingPunct="1">
-              <a:lnSpc>
-                <a:spcPct val="93000"/>
-              </a:lnSpc>
-              <a:buClr>
-                <a:srgbClr val="000000"/>
-              </a:buClr>
-              <a:buSzPct val="100000"/>
-              <a:buFont typeface="Arial" panose="020B0604020202020204" pitchFamily="34" charset="0"/>
-              <a:buChar char="•"/>
-              <a:defRPr/>
-            </a:pPr>
-            <a:endParaRPr lang="en-US" altLang="en-US" sz="1100" dirty="0">
-              <a:solidFill>
-                <a:schemeClr val="tx1"/>
-              </a:solidFill>
-              <a:latin typeface="Calibri" panose="020F0502020204030204" pitchFamily="34" charset="0"/>
-            </a:endParaRPr>
+              <a:t>Professional Experience</a:t>
+            </a:r>
           </a:p>
           <a:p>
             <a:pPr marL="20637" indent="0" eaLnBrk="1" hangingPunct="1">
@@ -4667,12 +4556,36 @@
               <a:buSzPct val="100000"/>
               <a:defRPr/>
             </a:pPr>
-            <a:endParaRPr lang="en-US" altLang="en-US" sz="1100" dirty="0">
-              <a:solidFill>
-                <a:schemeClr val="tx1"/>
-              </a:solidFill>
-              <a:latin typeface="Calibri" panose="020F0502020204030204" pitchFamily="34" charset="0"/>
-            </a:endParaRPr>
+            <a:r>
+              <a:rPr lang="en-US" altLang="en-US" sz="1100" dirty="0">
+                <a:solidFill>
+                  <a:schemeClr val="tx1"/>
+                </a:solidFill>
+                <a:latin typeface="Calibri" panose="020F0502020204030204" pitchFamily="34" charset="0"/>
+              </a:rPr>
+              <a:t>20 years of experience and experienced Sr Technical Consultant with a robust background in implementing and optimizing Salesforce, SAP solutions and MuleSoft. Specializing in Quote/Lead/Order to Cash in Sales Cloud, APEX, CPQ, and Service Cloud, alongside significant expertise in SAP ECC, SAP CRM, and SAP ABAP.</a:t>
+            </a:r>
+          </a:p>
+          <a:p>
+            <a:pPr marL="20637" indent="0" eaLnBrk="1" hangingPunct="1">
+              <a:lnSpc>
+                <a:spcPct val="93000"/>
+              </a:lnSpc>
+              <a:buClr>
+                <a:srgbClr val="000000"/>
+              </a:buClr>
+              <a:buSzPct val="100000"/>
+              <a:defRPr/>
+            </a:pPr>
+            <a:r>
+              <a:rPr lang="en-US" altLang="en-US" sz="1100" dirty="0">
+                <a:solidFill>
+                  <a:schemeClr val="tx1"/>
+                </a:solidFill>
+                <a:latin typeface="Calibri" panose="020F0502020204030204" pitchFamily="34" charset="0"/>
+              </a:rPr>
+              <a:t>Proven success in delivering high-impact solutions across various industries, contributing to the digital transformation of leading global organizations like Adobe, Thomson Reuters, Refinitiv, and London Stock Exchange Group (LSEG).</a:t>
+            </a:r>
           </a:p>
           <a:p>
             <a:pPr marL="20637" indent="0" eaLnBrk="1" hangingPunct="1">
@@ -4822,7 +4735,7 @@
         </p:nvSpPr>
         <p:spPr bwMode="auto">
           <a:xfrm>
-            <a:off x="116389" y="725488"/>
+            <a:off x="79473" y="720348"/>
             <a:ext cx="535828" cy="163745"/>
           </a:xfrm>
           <a:prstGeom prst="rect">
@@ -4907,8 +4820,8 @@
         </p:nvSpPr>
         <p:spPr bwMode="auto">
           <a:xfrm>
-            <a:off x="652218" y="715208"/>
-            <a:ext cx="1355636" cy="174026"/>
+            <a:off x="616745" y="729207"/>
+            <a:ext cx="1555162" cy="174026"/>
           </a:xfrm>
           <a:prstGeom prst="rect">
             <a:avLst/>
@@ -4968,7 +4881,7 @@
                 </a:solidFill>
                 <a:latin typeface="Calibri" pitchFamily="32" charset="0"/>
               </a:rPr>
-              <a:t>Solution Architect</a:t>
+              <a:t>Sr Technical Consultant</a:t>
             </a:r>
           </a:p>
         </p:txBody>
@@ -5104,7 +5017,7 @@
                 </a:solidFill>
                 <a:latin typeface="Calibri" panose="020F0502020204030204" pitchFamily="34" charset="0"/>
               </a:rPr>
-              <a:t>Refinitiv(LSEG) Transformation Program (Quote to Cash &amp; License Management ) : End to End Solution Architect on Salesforce, SAP, License Management Systems, Dell Boomi Platform for QTC transformation project. </a:t>
+              <a:t>LSEG Transformation Program (Quote to Cash &amp; License Management), CRM and Finance system unification and migration : End to End Solution Architect on Salesforce, SAP, License Management Systems, Integration Platform for QTC transformation project.</a:t>
             </a:r>
           </a:p>
           <a:p>
@@ -5122,7 +5035,7 @@
                 </a:solidFill>
                 <a:latin typeface="Calibri" panose="020F0502020204030204" pitchFamily="34" charset="0"/>
               </a:rPr>
-              <a:t>Responsibilities includes: End to end Solution designed based on Salesforce to add lot more flexibilities with attribute-based Pricing, Automated Contract Subscription based Operations and approvals. Transformed and migrated the existing Siebel assets into Salesforce CPQ subscriptions. </a:t>
+              <a:t>Responsibilities team's End to end Solution designed based on Salesforce to add lot more flexibilities with attribute-based Pricing, Automated Contract Subscription based Operations and approvals. Transformed and migrated the existing Siebel assets into Salesforce CPQ subscriptions.</a:t>
             </a:r>
           </a:p>
           <a:p>
@@ -5194,7 +5107,7 @@
                 </a:solidFill>
                 <a:latin typeface="Calibri" panose="020F0502020204030204" pitchFamily="34" charset="0"/>
               </a:rPr>
-              <a:t>Responsibilities include providing designing alternatives and best practices, conducted collection and analysis of functional, technical and non-functional requirements. Architect and design the trigger components framework, Common VF page framework and error Handling framework for the project.</a:t>
+              <a:t>Responsibilities include providing designing alternatives and best practices, conducted collection and analysis of functional, technical, and non-functional requirements. Architect and design the trigger components framework, Common VF page framework and error Handling framework for the project.</a:t>
             </a:r>
           </a:p>
           <a:p>
@@ -5210,9 +5123,9 @@
                 <a:solidFill>
                   <a:srgbClr val="000000"/>
                 </a:solidFill>
-                <a:latin typeface="Calibri" pitchFamily="32" charset="0"/>
+                <a:latin typeface="Calibri" panose="020F0502020204030204" pitchFamily="34" charset="0"/>
               </a:rPr>
-              <a:t>Lead Salesforce Technical  Consultant for Adobe  Territory  Assignment  and  Compensation project. Responsibilities include  auto  mate  the  sales  team  assignments  for  Account  and  Opportunities, correct  sales  visibility,  reduced  error rates, accurate  pipelines  and  comp  layouts,  better reporting,  streamlined  processes  across  different  teams  hand-off and  scalability.</a:t>
+              <a:t>Lead Salesforce Technical Consultant for Adobe Territory Assignment and Compensation project. Responsibilities include auto mate the sales team assignments for Account and Opportunities, correct sales visibility, reduced error rates, accurate pipelines and comp layouts, better reporting, streamlined processes across different team's hand-off and scalability.</a:t>
             </a:r>
           </a:p>
           <a:p>
@@ -5228,9 +5141,9 @@
                 <a:solidFill>
                   <a:srgbClr val="000000"/>
                 </a:solidFill>
-                <a:latin typeface="Calibri" pitchFamily="32" charset="0"/>
+                <a:latin typeface="Calibri" panose="020F0502020204030204" pitchFamily="34" charset="0"/>
               </a:rPr>
-              <a:t>Lead  Salesforce Technical Consultant  for  Adobe for  Enterprise  Lead  to  order  (ELO)  Project.  Responsible  for  creation  of  new processes  pertaining  to  products,  orders,  entitlements  and  integration  between SAP  and  Salesforce using  REST  and SOAP based  API  services  and  providing  functional  and  technical  documentations including  solution  design and process  flow  documentation</a:t>
+              <a:t>Lead Salesforce Technical Consultant for Adobe for Enterprise Lead to order (ELO) Project. Responsible for creation of new processes pertaining to products, orders, entitlements and integration between SAP and Salesforce using REST and SOAP based API services and providing functional and technical documentations including solution design and process flow documentation</a:t>
             </a:r>
           </a:p>
           <a:p>
@@ -5246,10 +5159,16 @@
                 <a:solidFill>
                   <a:srgbClr val="000000"/>
                 </a:solidFill>
-                <a:latin typeface="Calibri" pitchFamily="32" charset="0"/>
+                <a:latin typeface="Calibri" panose="020F0502020204030204" pitchFamily="34" charset="0"/>
               </a:rPr>
-              <a:t>Senior  SAP  Technical  Consultant for  Adobe for  Macromedia Data  migration,  SAP  Upgrade  projects.  Responsibilities include  requirements  workshops,  implementation  plan and  testing  scripts, migrate  the Business  Partner, Registration,  Contracts,  and  Case  data  from  legacy  systems  to  SAP  CRM  system,  created  new  utilities  for  updating profit  centers  on open  order/line  items.</a:t>
-            </a:r>
+              <a:t>Senior SAP Technical Consultant for Adobe for Macromedia Data migration, SAP Upgrade projects. Responsibilities include requirements workshops, implementation plan and testing scripts, migrate the Business Partner, Registration, Contracts, and Case data from legacy systems to SAP CRM system, created new utilities for updating profit centers on open order/line items.</a:t>
+            </a:r>
+            <a:endParaRPr lang="en-US" sz="1200" dirty="0">
+              <a:solidFill>
+                <a:srgbClr val="000000"/>
+              </a:solidFill>
+              <a:latin typeface="Calibri" pitchFamily="32" charset="0"/>
+            </a:endParaRPr>
           </a:p>
         </p:txBody>
       </p:sp>
@@ -5269,7 +5188,7 @@
         </p:nvSpPr>
         <p:spPr bwMode="auto">
           <a:xfrm>
-            <a:off x="0" y="22226"/>
+            <a:off x="15473" y="58097"/>
             <a:ext cx="6094413" cy="666750"/>
           </a:xfrm>
           <a:prstGeom prst="rect">
@@ -5403,56 +5322,6 @@
                 <a:latin typeface="Calibri" pitchFamily="32" charset="0"/>
               </a:rPr>
               <a:t> Ph- +44-7448623159</a:t>
-            </a:r>
-          </a:p>
-          <a:p>
-            <a:pPr>
-              <a:buClr>
-                <a:srgbClr val="000000"/>
-              </a:buClr>
-              <a:buSzPct val="100000"/>
-              <a:buFont typeface="Times New Roman" pitchFamily="16" charset="0"/>
-              <a:buNone/>
-              <a:tabLst>
-                <a:tab pos="0" algn="l"/>
-                <a:tab pos="457200" algn="l"/>
-                <a:tab pos="914400" algn="l"/>
-                <a:tab pos="1371600" algn="l"/>
-                <a:tab pos="1828800" algn="l"/>
-                <a:tab pos="2286000" algn="l"/>
-                <a:tab pos="2743200" algn="l"/>
-                <a:tab pos="3200400" algn="l"/>
-                <a:tab pos="3657600" algn="l"/>
-                <a:tab pos="4114800" algn="l"/>
-                <a:tab pos="4572000" algn="l"/>
-                <a:tab pos="5029200" algn="l"/>
-                <a:tab pos="5486400" algn="l"/>
-                <a:tab pos="5943600" algn="l"/>
-                <a:tab pos="6400800" algn="l"/>
-                <a:tab pos="6858000" algn="l"/>
-                <a:tab pos="7315200" algn="l"/>
-                <a:tab pos="7772400" algn="l"/>
-                <a:tab pos="8229600" algn="l"/>
-                <a:tab pos="8686800" algn="l"/>
-                <a:tab pos="9144000" algn="l"/>
-              </a:tabLst>
-            </a:pPr>
-            <a:r>
-              <a:rPr lang="en-US" altLang="en-US" sz="1200" b="1" dirty="0">
-                <a:solidFill>
-                  <a:srgbClr val="FFFFFF"/>
-                </a:solidFill>
-                <a:latin typeface="Calibri" pitchFamily="32" charset="0"/>
-              </a:rPr>
-              <a:t> Email : </a:t>
-            </a:r>
-            <a:r>
-              <a:rPr lang="en-GB" altLang="en-US" sz="1200" dirty="0"/>
-              <a:t>suresh.narra</a:t>
-            </a:r>
-            <a:r>
-              <a:rPr lang="en-GB" sz="1200" dirty="0"/>
-              <a:t>@tcs.com</a:t>
             </a:r>
           </a:p>
           <a:p>
